--- a/KDDM_phase1_presentation.pptx
+++ b/KDDM_phase1_presentation.pptx
@@ -17,6 +17,7 @@
     <p:sldId id="262" r:id="rId14"/>
     <p:sldId id="263" r:id="rId15"/>
     <p:sldId id="264" r:id="rId16"/>
+    <p:sldId id="265" r:id="rId17"/>
   </p:sldIdLst>
   <p:sldSz cx="12928600" cy="7315200"/>
   <p:notesSz cx="6858000" cy="9144000"/>
@@ -344,7 +345,7 @@
       </p:grpSpPr>
       <p:sp>
         <p:nvSpPr>
-          <p:cNvPr id="61" name="Shape 61"/>
+          <p:cNvPr id="67" name="Shape 67"/>
           <p:cNvSpPr/>
           <p:nvPr>
             <p:ph type="sldImg"/>
@@ -369,7 +370,7 @@
       </p:sp>
       <p:sp>
         <p:nvSpPr>
-          <p:cNvPr id="62" name="Shape 62"/>
+          <p:cNvPr id="68" name="Shape 68"/>
           <p:cNvSpPr/>
           <p:nvPr>
             <p:ph type="body" sz="quarter" idx="1"/>
@@ -473,7 +474,7 @@
 </file>
 
 <file path=ppt/slideLayouts/slideLayout1.xml><?xml version="1.0" encoding="utf-8"?>
-<p:sldLayout xmlns:a="http://schemas.openxmlformats.org/drawingml/2006/main" xmlns:r="http://schemas.openxmlformats.org/officeDocument/2006/relationships" xmlns:p="http://schemas.openxmlformats.org/presentationml/2006/main" xmlns:m="http://schemas.openxmlformats.org/officeDocument/2006/math" xmlns:a14="http://schemas.microsoft.com/office/drawing/2010/main" type="tx" showMasterSp="1" showMasterPhAnim="1">
+<p:sldLayout xmlns:a="http://schemas.openxmlformats.org/drawingml/2006/main" xmlns:r="http://schemas.openxmlformats.org/officeDocument/2006/relationships" xmlns:p="http://schemas.openxmlformats.org/presentationml/2006/main" xmlns:m="http://schemas.openxmlformats.org/officeDocument/2006/math" xmlns:a14="http://schemas.microsoft.com/office/drawing/2010/main" type="tx" showMasterSp="0" showMasterPhAnim="1">
   <p:cSld name="IWT_coverslide">
     <p:spTree>
       <p:nvGrpSpPr>
@@ -489,9 +490,76 @@
           <a:chExt cx="0" cy="0"/>
         </a:xfrm>
       </p:grpSpPr>
+      <p:sp>
+        <p:nvSpPr>
+          <p:cNvPr id="17" name="Rechteck 7"/>
+          <p:cNvSpPr/>
+          <p:nvPr/>
+        </p:nvSpPr>
+        <p:spPr>
+          <a:xfrm>
+            <a:off x="0" y="6707199"/>
+            <a:ext cx="12938125" cy="614118"/>
+          </a:xfrm>
+          <a:prstGeom prst="rect">
+            <a:avLst/>
+          </a:prstGeom>
+          <a:solidFill>
+            <a:srgbClr val="D9D9D9"/>
+          </a:solidFill>
+          <a:ln w="12700">
+            <a:miter lim="400000"/>
+          </a:ln>
+        </p:spPr>
+        <p:txBody>
+          <a:bodyPr lIns="45718" tIns="45718" rIns="45718" bIns="45718" anchor="ctr"/>
+          <a:lstStyle/>
+          <a:p>
+            <a:pPr algn="ctr">
+              <a:defRPr>
+                <a:solidFill>
+                  <a:srgbClr val="FFFFFF"/>
+                </a:solidFill>
+                <a:latin typeface="Arial"/>
+                <a:ea typeface="Arial"/>
+                <a:cs typeface="Arial"/>
+                <a:sym typeface="Arial"/>
+              </a:defRPr>
+            </a:pPr>
+          </a:p>
+        </p:txBody>
+      </p:sp>
+      <p:sp>
+        <p:nvSpPr>
+          <p:cNvPr id="18" name="Gerade Verbindung 17"/>
+          <p:cNvSpPr/>
+          <p:nvPr/>
+        </p:nvSpPr>
+        <p:spPr>
+          <a:xfrm>
+            <a:off x="880586" y="715716"/>
+            <a:ext cx="11868858" cy="1"/>
+          </a:xfrm>
+          <a:prstGeom prst="line">
+            <a:avLst/>
+          </a:prstGeom>
+          <a:ln w="6350">
+            <a:solidFill>
+              <a:srgbClr val="000000"/>
+            </a:solidFill>
+          </a:ln>
+        </p:spPr>
+        <p:txBody>
+          <a:bodyPr lIns="45718" tIns="45718" rIns="45718" bIns="45718"/>
+          <a:lstStyle/>
+          <a:p>
+            <a:pPr/>
+          </a:p>
+        </p:txBody>
+      </p:sp>
       <p:pic>
         <p:nvPicPr>
-          <p:cNvPr id="16" name="Bild 1" descr="Bild 1"/>
+          <p:cNvPr id="19" name="Bild 21" descr="Bild 21"/>
           <p:cNvPicPr>
             <a:picLocks noChangeAspect="1"/>
           </p:cNvPicPr>
@@ -499,6 +567,166 @@
         </p:nvPicPr>
         <p:blipFill>
           <a:blip r:embed="rId2">
+            <a:extLst/>
+          </a:blip>
+          <a:stretch>
+            <a:fillRect/>
+          </a:stretch>
+        </p:blipFill>
+        <p:spPr>
+          <a:xfrm>
+            <a:off x="11523016" y="150773"/>
+            <a:ext cx="1226428" cy="453804"/>
+          </a:xfrm>
+          <a:prstGeom prst="rect">
+            <a:avLst/>
+          </a:prstGeom>
+          <a:ln w="12700">
+            <a:miter lim="400000"/>
+          </a:ln>
+        </p:spPr>
+      </p:pic>
+      <p:sp>
+        <p:nvSpPr>
+          <p:cNvPr id="20" name="Textfeld 14"/>
+          <p:cNvSpPr txBox="1"/>
+          <p:nvPr/>
+        </p:nvSpPr>
+        <p:spPr>
+          <a:xfrm>
+            <a:off x="880588" y="6827791"/>
+            <a:ext cx="7675317" cy="400585"/>
+          </a:xfrm>
+          <a:prstGeom prst="rect">
+            <a:avLst/>
+          </a:prstGeom>
+          <a:ln w="12700">
+            <a:miter lim="400000"/>
+          </a:ln>
+          <a:extLst>
+            <a:ext uri="{C572A759-6A51-4108-AA02-DFA0A04FC94B}">
+              <ma14:wrappingTextBoxFlag xmlns:ma14="http://schemas.microsoft.com/office/mac/drawingml/2011/main" val="1"/>
+            </a:ext>
+          </a:extLst>
+        </p:spPr>
+        <p:txBody>
+          <a:bodyPr lIns="0" tIns="0" rIns="0" bIns="0">
+            <a:spAutoFit/>
+          </a:bodyPr>
+          <a:lstStyle/>
+          <a:p>
+            <a:pPr>
+              <a:defRPr sz="1400">
+                <a:latin typeface="Arial"/>
+                <a:ea typeface="Arial"/>
+                <a:cs typeface="Arial"/>
+                <a:sym typeface="Arial"/>
+              </a:defRPr>
+            </a:pPr>
+            <a:r>
+              <a:t>Kontakt: </a:t>
+            </a:r>
+            <a:r>
+              <a:rPr u="sng">
+                <a:solidFill>
+                  <a:srgbClr val="0000FF"/>
+                </a:solidFill>
+                <a:uFill>
+                  <a:solidFill>
+                    <a:srgbClr val="0000FF"/>
+                  </a:solidFill>
+                </a:uFill>
+                <a:hlinkClick r:id="rId3" invalidUrl="" action="" tgtFrame="" tooltip="" history="1" highlightClick="0" endSnd="0"/>
+              </a:rPr>
+              <a:t>....@tugraz.at</a:t>
+            </a:r>
+            <a:r>
+              <a:t>, </a:t>
+            </a:r>
+            <a:r>
+              <a:rPr u="sng">
+                <a:solidFill>
+                  <a:srgbClr val="0000FF"/>
+                </a:solidFill>
+                <a:uFill>
+                  <a:solidFill>
+                    <a:srgbClr val="0000FF"/>
+                  </a:solidFill>
+                </a:uFill>
+                <a:hlinkClick r:id="rId4" invalidUrl="" action="" tgtFrame="" tooltip="" history="1" highlightClick="0" endSnd="0"/>
+              </a:rPr>
+              <a:t>www.iwt.tugraz.at</a:t>
+            </a:r>
+            <a:endParaRPr u="sng">
+              <a:solidFill>
+                <a:srgbClr val="0070C0"/>
+              </a:solidFill>
+            </a:endParaRPr>
+          </a:p>
+          <a:p>
+            <a:pPr>
+              <a:defRPr sz="1400">
+                <a:latin typeface="Arial"/>
+                <a:ea typeface="Arial"/>
+                <a:cs typeface="Arial"/>
+                <a:sym typeface="Arial"/>
+              </a:defRPr>
+            </a:pPr>
+            <a:r>
+              <a:t>Titel der Veranstaltung, Ort &amp; Datum</a:t>
+            </a:r>
+          </a:p>
+        </p:txBody>
+      </p:sp>
+      <p:sp>
+        <p:nvSpPr>
+          <p:cNvPr id="21" name="Rechteck 19"/>
+          <p:cNvSpPr/>
+          <p:nvPr/>
+        </p:nvSpPr>
+        <p:spPr>
+          <a:xfrm>
+            <a:off x="1" y="715716"/>
+            <a:ext cx="610968" cy="614118"/>
+          </a:xfrm>
+          <a:prstGeom prst="rect">
+            <a:avLst/>
+          </a:prstGeom>
+          <a:solidFill>
+            <a:srgbClr val="F70146"/>
+          </a:solidFill>
+          <a:ln w="12700">
+            <a:miter lim="400000"/>
+          </a:ln>
+        </p:spPr>
+        <p:txBody>
+          <a:bodyPr lIns="45718" tIns="45718" rIns="45718" bIns="45718" anchor="ctr"/>
+          <a:lstStyle/>
+          <a:p>
+            <a:pPr algn="ctr">
+              <a:defRPr>
+                <a:solidFill>
+                  <a:srgbClr val="FFFFFF"/>
+                </a:solidFill>
+                <a:latin typeface="Arial"/>
+                <a:ea typeface="Arial"/>
+                <a:cs typeface="Arial"/>
+                <a:sym typeface="Arial"/>
+              </a:defRPr>
+            </a:pPr>
+          </a:p>
+        </p:txBody>
+      </p:sp>
+      <p:pic>
+        <p:nvPicPr>
+          <p:cNvPr id="22" name="Bild 1" descr="Bild 1"/>
+          <p:cNvPicPr>
+            <a:picLocks noChangeAspect="1"/>
+          </p:cNvPicPr>
+          <p:nvPr/>
+        </p:nvPicPr>
+        <p:blipFill>
+          <a:blip r:embed="rId5">
             <a:extLst/>
           </a:blip>
           <a:stretch>
@@ -520,7 +748,7 @@
       </p:pic>
       <p:sp>
         <p:nvSpPr>
-          <p:cNvPr id="17" name="Textfeld 271"/>
+          <p:cNvPr id="23" name="Textfeld 271"/>
           <p:cNvSpPr txBox="1"/>
           <p:nvPr/>
         </p:nvSpPr>
@@ -591,7 +819,7 @@
       </p:sp>
       <p:sp>
         <p:nvSpPr>
-          <p:cNvPr id="18" name="Klicken und eine Überschrift hinzufügen"/>
+          <p:cNvPr id="24" name="Klicken und eine Überschrift hinzufügen"/>
           <p:cNvSpPr txBox="1"/>
           <p:nvPr>
             <p:ph type="title" hasCustomPrompt="1"/>
@@ -605,6 +833,7 @@
           <a:prstGeom prst="rect">
             <a:avLst/>
           </a:prstGeom>
+          <a:noFill/>
         </p:spPr>
         <p:txBody>
           <a:bodyPr anchor="b"/>
@@ -627,7 +856,7 @@
       </p:sp>
       <p:sp>
         <p:nvSpPr>
-          <p:cNvPr id="19" name="Foliennummer"/>
+          <p:cNvPr id="25" name="Foliennummer"/>
           <p:cNvSpPr txBox="1"/>
           <p:nvPr>
             <p:ph type="sldNum" sz="quarter" idx="2"/>
@@ -675,7 +904,7 @@
       </p:grpSpPr>
       <p:sp>
         <p:nvSpPr>
-          <p:cNvPr id="26" name="Titeltext"/>
+          <p:cNvPr id="32" name="Titeltext"/>
           <p:cNvSpPr txBox="1"/>
           <p:nvPr>
             <p:ph type="title"/>
@@ -699,7 +928,7 @@
       </p:sp>
       <p:sp>
         <p:nvSpPr>
-          <p:cNvPr id="27" name="Textebene 1…"/>
+          <p:cNvPr id="33" name="Textebene 1…"/>
           <p:cNvSpPr txBox="1"/>
           <p:nvPr>
             <p:ph type="body" sz="quarter" idx="1"/>
@@ -747,7 +976,7 @@
       </p:sp>
       <p:sp>
         <p:nvSpPr>
-          <p:cNvPr id="28" name="Foliennummer"/>
+          <p:cNvPr id="34" name="Foliennummer"/>
           <p:cNvSpPr txBox="1"/>
           <p:nvPr>
             <p:ph type="sldNum" sz="quarter" idx="2"/>
@@ -795,7 +1024,7 @@
       </p:grpSpPr>
       <p:sp>
         <p:nvSpPr>
-          <p:cNvPr id="35" name="Textebene 1…"/>
+          <p:cNvPr id="41" name="Textebene 1…"/>
           <p:cNvSpPr txBox="1"/>
           <p:nvPr>
             <p:ph type="body" sz="quarter" idx="1"/>
@@ -843,7 +1072,7 @@
       </p:sp>
       <p:sp>
         <p:nvSpPr>
-          <p:cNvPr id="36" name="Titeltext"/>
+          <p:cNvPr id="42" name="Titeltext"/>
           <p:cNvSpPr txBox="1"/>
           <p:nvPr>
             <p:ph type="title"/>
@@ -857,10 +1086,19 @@
           <a:prstGeom prst="rect">
             <a:avLst/>
           </a:prstGeom>
+          <a:noFill/>
         </p:spPr>
         <p:txBody>
           <a:bodyPr/>
-          <a:lstStyle/>
+          <a:lstStyle>
+            <a:lvl1pPr>
+              <a:defRPr>
+                <a:solidFill>
+                  <a:srgbClr val="000000"/>
+                </a:solidFill>
+              </a:defRPr>
+            </a:lvl1pPr>
+          </a:lstStyle>
           <a:p>
             <a:pPr/>
             <a:r>
@@ -871,7 +1109,7 @@
       </p:sp>
       <p:sp>
         <p:nvSpPr>
-          <p:cNvPr id="37" name="Foliennummer"/>
+          <p:cNvPr id="43" name="Foliennummer"/>
           <p:cNvSpPr txBox="1"/>
           <p:nvPr>
             <p:ph type="sldNum" sz="quarter" idx="2"/>
@@ -919,7 +1157,7 @@
       </p:grpSpPr>
       <p:sp>
         <p:nvSpPr>
-          <p:cNvPr id="44" name="Titeltext"/>
+          <p:cNvPr id="50" name="Titeltext"/>
           <p:cNvSpPr txBox="1"/>
           <p:nvPr>
             <p:ph type="title"/>
@@ -929,10 +1167,19 @@
           <a:prstGeom prst="rect">
             <a:avLst/>
           </a:prstGeom>
+          <a:noFill/>
         </p:spPr>
         <p:txBody>
           <a:bodyPr/>
-          <a:lstStyle/>
+          <a:lstStyle>
+            <a:lvl1pPr>
+              <a:defRPr>
+                <a:solidFill>
+                  <a:srgbClr val="000000"/>
+                </a:solidFill>
+              </a:defRPr>
+            </a:lvl1pPr>
+          </a:lstStyle>
           <a:p>
             <a:pPr/>
             <a:r>
@@ -943,7 +1190,7 @@
       </p:sp>
       <p:sp>
         <p:nvSpPr>
-          <p:cNvPr id="45" name="Textebene 1…"/>
+          <p:cNvPr id="51" name="Textebene 1…"/>
           <p:cNvSpPr txBox="1"/>
           <p:nvPr>
             <p:ph type="body" sz="quarter" idx="1"/>
@@ -991,7 +1238,7 @@
       </p:sp>
       <p:sp>
         <p:nvSpPr>
-          <p:cNvPr id="46" name="Foliennummer"/>
+          <p:cNvPr id="52" name="Foliennummer"/>
           <p:cNvSpPr txBox="1"/>
           <p:nvPr>
             <p:ph type="sldNum" sz="quarter" idx="2"/>
@@ -1039,7 +1286,7 @@
       </p:grpSpPr>
       <p:sp>
         <p:nvSpPr>
-          <p:cNvPr id="53" name="Titeltext"/>
+          <p:cNvPr id="59" name="Titeltext"/>
           <p:cNvSpPr txBox="1"/>
           <p:nvPr>
             <p:ph type="title"/>
@@ -1053,10 +1300,19 @@
           <a:prstGeom prst="rect">
             <a:avLst/>
           </a:prstGeom>
+          <a:noFill/>
         </p:spPr>
         <p:txBody>
           <a:bodyPr/>
-          <a:lstStyle/>
+          <a:lstStyle>
+            <a:lvl1pPr>
+              <a:defRPr>
+                <a:solidFill>
+                  <a:srgbClr val="000000"/>
+                </a:solidFill>
+              </a:defRPr>
+            </a:lvl1pPr>
+          </a:lstStyle>
           <a:p>
             <a:pPr/>
             <a:r>
@@ -1067,7 +1323,7 @@
       </p:sp>
       <p:sp>
         <p:nvSpPr>
-          <p:cNvPr id="54" name="Textebene 1…"/>
+          <p:cNvPr id="60" name="Textebene 1…"/>
           <p:cNvSpPr txBox="1"/>
           <p:nvPr>
             <p:ph type="body" sz="quarter" idx="1"/>
@@ -1115,7 +1371,7 @@
       </p:sp>
       <p:sp>
         <p:nvSpPr>
-          <p:cNvPr id="55" name="Foliennummer"/>
+          <p:cNvPr id="61" name="Foliennummer"/>
           <p:cNvSpPr txBox="1"/>
           <p:nvPr>
             <p:ph type="sldNum" sz="quarter" idx="2"/>
@@ -1411,6 +1667,9 @@
           <a:prstGeom prst="rect">
             <a:avLst/>
           </a:prstGeom>
+          <a:solidFill>
+            <a:srgbClr val="FFFFFF"/>
+          </a:solidFill>
           <a:ln w="12700">
             <a:miter lim="400000"/>
           </a:ln>
@@ -1497,7 +1756,116 @@
       </p:sp>
       <p:sp>
         <p:nvSpPr>
-          <p:cNvPr id="9" name="Foliennummer"/>
+          <p:cNvPr id="9" name="Hockey"/>
+          <p:cNvSpPr/>
+          <p:nvPr/>
+        </p:nvSpPr>
+        <p:spPr>
+          <a:xfrm>
+            <a:off x="11784622" y="5265199"/>
+            <a:ext cx="1066406" cy="1983968"/>
+          </a:xfrm>
+          <a:custGeom>
+            <a:avLst/>
+            <a:gdLst/>
+            <a:ahLst/>
+            <a:cxnLst>
+              <a:cxn ang="0">
+                <a:pos x="wd2" y="hd2"/>
+              </a:cxn>
+              <a:cxn ang="5400000">
+                <a:pos x="wd2" y="hd2"/>
+              </a:cxn>
+              <a:cxn ang="10800000">
+                <a:pos x="wd2" y="hd2"/>
+              </a:cxn>
+              <a:cxn ang="16200000">
+                <a:pos x="wd2" y="hd2"/>
+              </a:cxn>
+            </a:cxnLst>
+            <a:rect l="0" t="0" r="r" b="b"/>
+            <a:pathLst>
+              <a:path w="21137" h="21405" fill="norm" stroke="1" extrusionOk="0">
+                <a:moveTo>
+                  <a:pt x="20360" y="4"/>
+                </a:moveTo>
+                <a:cubicBezTo>
+                  <a:pt x="20162" y="-10"/>
+                  <a:pt x="19920" y="15"/>
+                  <a:pt x="19622" y="104"/>
+                </a:cubicBezTo>
+                <a:lnTo>
+                  <a:pt x="8335" y="17757"/>
+                </a:lnTo>
+                <a:cubicBezTo>
+                  <a:pt x="8335" y="17757"/>
+                  <a:pt x="7581" y="18867"/>
+                  <a:pt x="4624" y="19356"/>
+                </a:cubicBezTo>
+                <a:lnTo>
+                  <a:pt x="627" y="20043"/>
+                </a:lnTo>
+                <a:cubicBezTo>
+                  <a:pt x="627" y="20043"/>
+                  <a:pt x="-463" y="20176"/>
+                  <a:pt x="230" y="20754"/>
+                </a:cubicBezTo>
+                <a:cubicBezTo>
+                  <a:pt x="230" y="20754"/>
+                  <a:pt x="666" y="21176"/>
+                  <a:pt x="1088" y="21302"/>
+                </a:cubicBezTo>
+                <a:cubicBezTo>
+                  <a:pt x="1088" y="21302"/>
+                  <a:pt x="1726" y="21590"/>
+                  <a:pt x="3453" y="21205"/>
+                </a:cubicBezTo>
+                <a:lnTo>
+                  <a:pt x="6406" y="20473"/>
+                </a:lnTo>
+                <a:cubicBezTo>
+                  <a:pt x="6406" y="20473"/>
+                  <a:pt x="8092" y="20229"/>
+                  <a:pt x="8903" y="19346"/>
+                </a:cubicBezTo>
+                <a:lnTo>
+                  <a:pt x="21137" y="432"/>
+                </a:lnTo>
+                <a:cubicBezTo>
+                  <a:pt x="21137" y="432"/>
+                  <a:pt x="20953" y="46"/>
+                  <a:pt x="20360" y="4"/>
+                </a:cubicBezTo>
+                <a:close/>
+              </a:path>
+            </a:pathLst>
+          </a:custGeom>
+          <a:solidFill>
+            <a:srgbClr val="FFFFFF"/>
+          </a:solidFill>
+          <a:ln w="25400">
+            <a:solidFill>
+              <a:srgbClr val="E2324C"/>
+            </a:solidFill>
+          </a:ln>
+        </p:spPr>
+        <p:txBody>
+          <a:bodyPr lIns="45718" tIns="45718" rIns="45718" bIns="45718" anchor="ctr"/>
+          <a:lstStyle/>
+          <a:p>
+            <a:pPr>
+              <a:defRPr>
+                <a:solidFill>
+                  <a:srgbClr val="B5160F"/>
+                </a:solidFill>
+              </a:defRPr>
+            </a:pPr>
+          </a:p>
+        </p:txBody>
+      </p:sp>
+      <p:sp>
+        <p:nvSpPr>
+          <p:cNvPr id="10" name="Foliennummer"/>
           <p:cNvSpPr txBox="1"/>
           <p:nvPr>
             <p:ph type="sldNum" sz="quarter" idx="2"/>
@@ -1551,7 +1919,7 @@
   <p:transition xmlns:p14="http://schemas.microsoft.com/office/powerpoint/2010/main" spd="med" advClick="1"/>
   <p:txStyles>
     <p:titleStyle>
-      <a:lvl1pPr marL="0" marR="0" indent="0" algn="l" defTabSz="648080" rtl="0" latinLnBrk="0">
+      <a:lvl1pPr marL="0" marR="0" indent="0" algn="l" defTabSz="648080" latinLnBrk="0">
         <a:lnSpc>
           <a:spcPct val="90000"/>
         </a:lnSpc>
@@ -1568,7 +1936,7 @@
         <a:tabLst/>
         <a:defRPr b="0" baseline="0" cap="none" i="0" spc="0" strike="noStrike" sz="3400" u="none">
           <a:solidFill>
-            <a:srgbClr val="000000"/>
+            <a:srgbClr val="E2324C"/>
           </a:solidFill>
           <a:uFillTx/>
           <a:latin typeface="Arial"/>
@@ -1577,7 +1945,7 @@
           <a:sym typeface="Arial"/>
         </a:defRPr>
       </a:lvl1pPr>
-      <a:lvl2pPr marL="0" marR="0" indent="0" algn="l" defTabSz="648080" rtl="0" latinLnBrk="0">
+      <a:lvl2pPr marL="0" marR="0" indent="0" algn="l" defTabSz="648080" latinLnBrk="0">
         <a:lnSpc>
           <a:spcPct val="90000"/>
         </a:lnSpc>
@@ -1594,7 +1962,7 @@
         <a:tabLst/>
         <a:defRPr b="0" baseline="0" cap="none" i="0" spc="0" strike="noStrike" sz="3400" u="none">
           <a:solidFill>
-            <a:srgbClr val="000000"/>
+            <a:srgbClr val="E2324C"/>
           </a:solidFill>
           <a:uFillTx/>
           <a:latin typeface="Arial"/>
@@ -1603,7 +1971,7 @@
           <a:sym typeface="Arial"/>
         </a:defRPr>
       </a:lvl2pPr>
-      <a:lvl3pPr marL="0" marR="0" indent="0" algn="l" defTabSz="648080" rtl="0" latinLnBrk="0">
+      <a:lvl3pPr marL="0" marR="0" indent="0" algn="l" defTabSz="648080" latinLnBrk="0">
         <a:lnSpc>
           <a:spcPct val="90000"/>
         </a:lnSpc>
@@ -1620,7 +1988,7 @@
         <a:tabLst/>
         <a:defRPr b="0" baseline="0" cap="none" i="0" spc="0" strike="noStrike" sz="3400" u="none">
           <a:solidFill>
-            <a:srgbClr val="000000"/>
+            <a:srgbClr val="E2324C"/>
           </a:solidFill>
           <a:uFillTx/>
           <a:latin typeface="Arial"/>
@@ -1629,7 +1997,7 @@
           <a:sym typeface="Arial"/>
         </a:defRPr>
       </a:lvl3pPr>
-      <a:lvl4pPr marL="0" marR="0" indent="0" algn="l" defTabSz="648080" rtl="0" latinLnBrk="0">
+      <a:lvl4pPr marL="0" marR="0" indent="0" algn="l" defTabSz="648080" latinLnBrk="0">
         <a:lnSpc>
           <a:spcPct val="90000"/>
         </a:lnSpc>
@@ -1646,7 +2014,7 @@
         <a:tabLst/>
         <a:defRPr b="0" baseline="0" cap="none" i="0" spc="0" strike="noStrike" sz="3400" u="none">
           <a:solidFill>
-            <a:srgbClr val="000000"/>
+            <a:srgbClr val="E2324C"/>
           </a:solidFill>
           <a:uFillTx/>
           <a:latin typeface="Arial"/>
@@ -1655,7 +2023,7 @@
           <a:sym typeface="Arial"/>
         </a:defRPr>
       </a:lvl4pPr>
-      <a:lvl5pPr marL="0" marR="0" indent="0" algn="l" defTabSz="648080" rtl="0" latinLnBrk="0">
+      <a:lvl5pPr marL="0" marR="0" indent="0" algn="l" defTabSz="648080" latinLnBrk="0">
         <a:lnSpc>
           <a:spcPct val="90000"/>
         </a:lnSpc>
@@ -1672,7 +2040,7 @@
         <a:tabLst/>
         <a:defRPr b="0" baseline="0" cap="none" i="0" spc="0" strike="noStrike" sz="3400" u="none">
           <a:solidFill>
-            <a:srgbClr val="000000"/>
+            <a:srgbClr val="E2324C"/>
           </a:solidFill>
           <a:uFillTx/>
           <a:latin typeface="Arial"/>
@@ -1681,7 +2049,7 @@
           <a:sym typeface="Arial"/>
         </a:defRPr>
       </a:lvl5pPr>
-      <a:lvl6pPr marL="0" marR="0" indent="0" algn="l" defTabSz="648080" rtl="0" latinLnBrk="0">
+      <a:lvl6pPr marL="0" marR="0" indent="0" algn="l" defTabSz="648080" latinLnBrk="0">
         <a:lnSpc>
           <a:spcPct val="90000"/>
         </a:lnSpc>
@@ -1698,7 +2066,7 @@
         <a:tabLst/>
         <a:defRPr b="0" baseline="0" cap="none" i="0" spc="0" strike="noStrike" sz="3400" u="none">
           <a:solidFill>
-            <a:srgbClr val="000000"/>
+            <a:srgbClr val="E2324C"/>
           </a:solidFill>
           <a:uFillTx/>
           <a:latin typeface="Arial"/>
@@ -1707,7 +2075,7 @@
           <a:sym typeface="Arial"/>
         </a:defRPr>
       </a:lvl6pPr>
-      <a:lvl7pPr marL="0" marR="0" indent="0" algn="l" defTabSz="648080" rtl="0" latinLnBrk="0">
+      <a:lvl7pPr marL="0" marR="0" indent="0" algn="l" defTabSz="648080" latinLnBrk="0">
         <a:lnSpc>
           <a:spcPct val="90000"/>
         </a:lnSpc>
@@ -1724,7 +2092,7 @@
         <a:tabLst/>
         <a:defRPr b="0" baseline="0" cap="none" i="0" spc="0" strike="noStrike" sz="3400" u="none">
           <a:solidFill>
-            <a:srgbClr val="000000"/>
+            <a:srgbClr val="E2324C"/>
           </a:solidFill>
           <a:uFillTx/>
           <a:latin typeface="Arial"/>
@@ -1733,7 +2101,7 @@
           <a:sym typeface="Arial"/>
         </a:defRPr>
       </a:lvl7pPr>
-      <a:lvl8pPr marL="0" marR="0" indent="0" algn="l" defTabSz="648080" rtl="0" latinLnBrk="0">
+      <a:lvl8pPr marL="0" marR="0" indent="0" algn="l" defTabSz="648080" latinLnBrk="0">
         <a:lnSpc>
           <a:spcPct val="90000"/>
         </a:lnSpc>
@@ -1750,7 +2118,7 @@
         <a:tabLst/>
         <a:defRPr b="0" baseline="0" cap="none" i="0" spc="0" strike="noStrike" sz="3400" u="none">
           <a:solidFill>
-            <a:srgbClr val="000000"/>
+            <a:srgbClr val="E2324C"/>
           </a:solidFill>
           <a:uFillTx/>
           <a:latin typeface="Arial"/>
@@ -1759,7 +2127,7 @@
           <a:sym typeface="Arial"/>
         </a:defRPr>
       </a:lvl8pPr>
-      <a:lvl9pPr marL="0" marR="0" indent="0" algn="l" defTabSz="648080" rtl="0" latinLnBrk="0">
+      <a:lvl9pPr marL="0" marR="0" indent="0" algn="l" defTabSz="648080" latinLnBrk="0">
         <a:lnSpc>
           <a:spcPct val="90000"/>
         </a:lnSpc>
@@ -1776,7 +2144,7 @@
         <a:tabLst/>
         <a:defRPr b="0" baseline="0" cap="none" i="0" spc="0" strike="noStrike" sz="3400" u="none">
           <a:solidFill>
-            <a:srgbClr val="000000"/>
+            <a:srgbClr val="E2324C"/>
           </a:solidFill>
           <a:uFillTx/>
           <a:latin typeface="Arial"/>
@@ -2281,7 +2649,7 @@
       </p:grpSpPr>
       <p:sp>
         <p:nvSpPr>
-          <p:cNvPr id="64" name="Fußzeilenplatzhalter 2"/>
+          <p:cNvPr id="70" name="Fußzeilenplatzhalter 2"/>
           <p:cNvSpPr txBox="1"/>
           <p:nvPr/>
         </p:nvSpPr>
@@ -2409,7 +2777,7 @@
       </p:sp>
       <p:sp>
         <p:nvSpPr>
-          <p:cNvPr id="65" name="Titel 1"/>
+          <p:cNvPr id="71" name="Titel 1"/>
           <p:cNvSpPr txBox="1"/>
           <p:nvPr>
             <p:ph type="title"/>
@@ -2432,6 +2800,124 @@
             <a:r>
               <a:t>Knowledge Discovery and Data Mining 1 - Phase 1 </a:t>
             </a:r>
+          </a:p>
+        </p:txBody>
+      </p:sp>
+    </p:spTree>
+  </p:cSld>
+  <p:clrMapOvr>
+    <a:masterClrMapping/>
+  </p:clrMapOvr>
+  <p:transition xmlns:p14="http://schemas.microsoft.com/office/powerpoint/2010/main" spd="med" advClick="1"/>
+</p:sld>
+</file>
+
+<file path=ppt/slides/slide10.xml><?xml version="1.0" encoding="utf-8"?>
+<p:sld xmlns:a="http://schemas.openxmlformats.org/drawingml/2006/main" xmlns:r="http://schemas.openxmlformats.org/officeDocument/2006/relationships" xmlns:p="http://schemas.openxmlformats.org/presentationml/2006/main" xmlns:m="http://schemas.openxmlformats.org/officeDocument/2006/math" xmlns:a14="http://schemas.microsoft.com/office/drawing/2010/main" showMasterSp="1" showMasterPhAnim="1">
+  <p:cSld>
+    <p:spTree>
+      <p:nvGrpSpPr>
+        <p:cNvPr id="1" name=""/>
+        <p:cNvGrpSpPr/>
+        <p:nvPr/>
+      </p:nvGrpSpPr>
+      <p:grpSpPr>
+        <a:xfrm>
+          <a:off x="0" y="0"/>
+          <a:ext cx="0" cy="0"/>
+          <a:chOff x="0" y="0"/>
+          <a:chExt cx="0" cy="0"/>
+        </a:xfrm>
+      </p:grpSpPr>
+      <p:sp>
+        <p:nvSpPr>
+          <p:cNvPr id="109" name="Most important findings"/>
+          <p:cNvSpPr txBox="1"/>
+          <p:nvPr>
+            <p:ph type="title"/>
+          </p:nvPr>
+        </p:nvSpPr>
+        <p:spPr>
+          <a:xfrm>
+            <a:off x="880588" y="884237"/>
+            <a:ext cx="11876400" cy="614118"/>
+          </a:xfrm>
+          <a:prstGeom prst="rect">
+            <a:avLst/>
+          </a:prstGeom>
+        </p:spPr>
+        <p:txBody>
+          <a:bodyPr/>
+          <a:lstStyle>
+            <a:lvl1pPr>
+              <a:defRPr>
+                <a:solidFill>
+                  <a:srgbClr val="040102"/>
+                </a:solidFill>
+              </a:defRPr>
+            </a:lvl1pPr>
+          </a:lstStyle>
+          <a:p>
+            <a:pPr/>
+            <a:r>
+              <a:t>Most important findings</a:t>
+            </a:r>
+          </a:p>
+        </p:txBody>
+      </p:sp>
+      <p:sp>
+        <p:nvSpPr>
+          <p:cNvPr id="110" name="Zum Bearbeiten doppelklicken"/>
+          <p:cNvSpPr txBox="1"/>
+          <p:nvPr>
+            <p:ph type="body" sz="quarter" idx="1"/>
+          </p:nvPr>
+        </p:nvSpPr>
+        <p:spPr>
+          <a:xfrm>
+            <a:off x="880588" y="349996"/>
+            <a:ext cx="10187500" cy="286723"/>
+          </a:xfrm>
+          <a:prstGeom prst="rect">
+            <a:avLst/>
+          </a:prstGeom>
+        </p:spPr>
+        <p:txBody>
+          <a:bodyPr/>
+          <a:lstStyle/>
+          <a:p>
+            <a:pPr/>
+          </a:p>
+        </p:txBody>
+      </p:sp>
+      <p:sp>
+        <p:nvSpPr>
+          <p:cNvPr id="111" name="Foliennummer"/>
+          <p:cNvSpPr txBox="1"/>
+          <p:nvPr>
+            <p:ph type="sldNum" sz="quarter" idx="4294967295"/>
+          </p:nvPr>
+        </p:nvSpPr>
+        <p:spPr>
+          <a:xfrm>
+            <a:off x="241984" y="924083"/>
+            <a:ext cx="127001" cy="197384"/>
+          </a:xfrm>
+          <a:prstGeom prst="rect">
+            <a:avLst/>
+          </a:prstGeom>
+          <a:extLst>
+            <a:ext uri="{C572A759-6A51-4108-AA02-DFA0A04FC94B}">
+              <ma14:wrappingTextBoxFlag xmlns:ma14="http://schemas.microsoft.com/office/mac/drawingml/2011/main" val="1"/>
+            </a:ext>
+          </a:extLst>
+        </p:spPr>
+        <p:txBody>
+          <a:bodyPr/>
+          <a:lstStyle/>
+          <a:p>
+            <a:pPr/>
+            <a:fld id="{86CB4B4D-7CA3-9044-876B-883B54F8677D}" type="slidenum"/>
           </a:p>
         </p:txBody>
       </p:sp>
@@ -2463,7 +2949,7 @@
       </p:grpSpPr>
       <p:sp>
         <p:nvSpPr>
-          <p:cNvPr id="67" name="Foliennummernplatzhalter 5"/>
+          <p:cNvPr id="73" name="Foliennummernplatzhalter 5"/>
           <p:cNvSpPr txBox="1"/>
           <p:nvPr>
             <p:ph type="sldNum" sz="quarter" idx="4294967295"/>
@@ -2494,7 +2980,7 @@
       </p:sp>
       <p:sp>
         <p:nvSpPr>
-          <p:cNvPr id="68" name="Titel 1"/>
+          <p:cNvPr id="74" name="Titel 1"/>
           <p:cNvSpPr txBox="1"/>
           <p:nvPr>
             <p:ph type="title"/>
@@ -2511,7 +2997,15 @@
         </p:spPr>
         <p:txBody>
           <a:bodyPr/>
-          <a:lstStyle/>
+          <a:lstStyle>
+            <a:lvl1pPr>
+              <a:defRPr>
+                <a:solidFill>
+                  <a:srgbClr val="0D0305"/>
+                </a:solidFill>
+              </a:defRPr>
+            </a:lvl1pPr>
+          </a:lstStyle>
           <a:p>
             <a:pPr/>
             <a:r>
@@ -2522,7 +3016,7 @@
       </p:sp>
       <p:sp>
         <p:nvSpPr>
-          <p:cNvPr id="69" name="Textplatzhalter 2"/>
+          <p:cNvPr id="75" name="Textplatzhalter 2"/>
           <p:cNvSpPr txBox="1"/>
           <p:nvPr>
             <p:ph type="body" sz="quarter" idx="1"/>
@@ -2547,14 +3041,14 @@
       </p:sp>
       <p:sp>
         <p:nvSpPr>
-          <p:cNvPr id="70" name="Preserve as much information as possible…"/>
+          <p:cNvPr id="76" name="Preserve as much information as possible…"/>
           <p:cNvSpPr txBox="1"/>
           <p:nvPr/>
         </p:nvSpPr>
         <p:spPr>
           <a:xfrm>
             <a:off x="755880" y="1778013"/>
-            <a:ext cx="12204299" cy="4028439"/>
+            <a:ext cx="12204299" cy="4815839"/>
           </a:xfrm>
           <a:prstGeom prst="rect">
             <a:avLst/>
@@ -2588,7 +3082,7 @@
               <a:buChar char="•"/>
             </a:pPr>
             <a:r>
-              <a:t>Drop columns that are contradictory to one another, keep the more relevant one </a:t>
+              <a:t>For columns that are contradictory to one another, keep the more relevant one </a:t>
             </a:r>
           </a:p>
           <a:p>
@@ -2599,6 +3093,18 @@
             <a:r>
               <a:t>Use domain knowledge but due to synthesized data set accept some values one wouldn’t find in the real world </a:t>
             </a:r>
+          </a:p>
+          <a:p>
+            <a:pPr marL="260684" indent="-260684">
+              <a:buSzPct val="100000"/>
+              <a:buChar char="•"/>
+            </a:pPr>
+            <a:r>
+              <a:t>Diversity encouraged </a:t>
+            </a:r>
+          </a:p>
+          <a:p>
+            <a:pPr/>
           </a:p>
           <a:p>
             <a:pPr marL="260684" indent="-260684">
@@ -2654,7 +3160,7 @@
 </file>
 
 <file path=ppt/slides/slide3.xml><?xml version="1.0" encoding="utf-8"?>
-<p:sld xmlns:a="http://schemas.openxmlformats.org/drawingml/2006/main" xmlns:r="http://schemas.openxmlformats.org/officeDocument/2006/relationships" xmlns:p="http://schemas.openxmlformats.org/presentationml/2006/main" xmlns:m="http://schemas.openxmlformats.org/officeDocument/2006/math" xmlns:a14="http://schemas.microsoft.com/office/drawing/2010/main" showMasterSp="1" showMasterPhAnim="1">
+<p:sld xmlns:a="http://schemas.openxmlformats.org/drawingml/2006/main" xmlns:r="http://schemas.openxmlformats.org/officeDocument/2006/relationships" xmlns:p="http://schemas.openxmlformats.org/presentationml/2006/main" xmlns:m="http://schemas.openxmlformats.org/officeDocument/2006/math" xmlns:a14="http://schemas.microsoft.com/office/drawing/2010/main" show="0" showMasterSp="1" showMasterPhAnim="1">
   <p:cSld>
     <p:spTree>
       <p:nvGrpSpPr>
@@ -2672,7 +3178,7 @@
       </p:grpSpPr>
       <p:sp>
         <p:nvSpPr>
-          <p:cNvPr id="72" name="Foliennummernplatzhalter 5"/>
+          <p:cNvPr id="78" name="Foliennummernplatzhalter 5"/>
           <p:cNvSpPr txBox="1"/>
           <p:nvPr>
             <p:ph type="sldNum" sz="quarter" idx="4294967295"/>
@@ -2680,8 +3186,8 @@
         </p:nvSpPr>
         <p:spPr>
           <a:xfrm>
-            <a:off x="241985" y="924083"/>
-            <a:ext cx="127001" cy="197384"/>
+            <a:off x="239839" y="924083"/>
+            <a:ext cx="131293" cy="197384"/>
           </a:xfrm>
           <a:prstGeom prst="rect">
             <a:avLst/>
@@ -2703,7 +3209,7 @@
       </p:sp>
       <p:sp>
         <p:nvSpPr>
-          <p:cNvPr id="73" name="Textplatzhalter 1"/>
+          <p:cNvPr id="79" name="Textplatzhalter 1"/>
           <p:cNvSpPr txBox="1"/>
           <p:nvPr>
             <p:ph type="body" sz="quarter" idx="1"/>
@@ -2728,7 +3234,7 @@
       </p:sp>
       <p:sp>
         <p:nvSpPr>
-          <p:cNvPr id="74" name="Titel 3"/>
+          <p:cNvPr id="80" name="Titel 3"/>
           <p:cNvSpPr txBox="1"/>
           <p:nvPr>
             <p:ph type="title"/>
@@ -2760,7 +3266,7 @@
       </p:sp>
       <p:sp>
         <p:nvSpPr>
-          <p:cNvPr id="75" name="Discrepancy in depiction of gender values: f/ female , m/male…"/>
+          <p:cNvPr id="81" name="Discrepancy in depiction of gender values: f/ female , m/male…"/>
           <p:cNvSpPr txBox="1"/>
           <p:nvPr/>
         </p:nvSpPr>
@@ -3020,7 +3526,7 @@
       </p:grpSpPr>
       <p:sp>
         <p:nvSpPr>
-          <p:cNvPr id="77" name="Preprocessing"/>
+          <p:cNvPr id="83" name="Preprocessing"/>
           <p:cNvSpPr txBox="1"/>
           <p:nvPr>
             <p:ph type="title"/>
@@ -3037,14 +3543,22 @@
           <a:p>
             <a:pPr/>
             <a:r>
-              <a:t>Preprocessing </a:t>
+              <a:rPr>
+                <a:solidFill>
+                  <a:srgbClr val="000000"/>
+                </a:solidFill>
+              </a:rPr>
+              <a:t>Preprocessing</a:t>
+            </a:r>
+            <a:r>
+              <a:t> </a:t>
             </a:r>
           </a:p>
         </p:txBody>
       </p:sp>
       <p:sp>
         <p:nvSpPr>
-          <p:cNvPr id="78" name="Zum Bearbeiten doppelklicken"/>
+          <p:cNvPr id="84" name="Zum Bearbeiten doppelklicken"/>
           <p:cNvSpPr txBox="1"/>
           <p:nvPr>
             <p:ph type="body" sz="quarter" idx="1"/>
@@ -3065,14 +3579,14 @@
       </p:sp>
       <p:sp>
         <p:nvSpPr>
-          <p:cNvPr id="79" name="Discrepancies found:…"/>
+          <p:cNvPr id="85" name="Discrepancies found:…"/>
           <p:cNvSpPr txBox="1"/>
           <p:nvPr/>
         </p:nvSpPr>
         <p:spPr>
           <a:xfrm>
             <a:off x="809357" y="1564862"/>
-            <a:ext cx="7123790" cy="2377439"/>
+            <a:ext cx="6696120" cy="3418839"/>
           </a:xfrm>
           <a:prstGeom prst="rect">
             <a:avLst/>
@@ -3093,11 +3607,66 @@
           <a:lstStyle/>
           <a:p>
             <a:pPr>
-              <a:defRPr sz="2500"/>
+              <a:defRPr sz="2400"/>
             </a:pPr>
             <a:r>
               <a:t>Discrepancies found: </a:t>
             </a:r>
+          </a:p>
+          <a:p>
+            <a:pPr marL="260684" indent="-260684">
+              <a:buSzPct val="100000"/>
+              <a:buChar char="•"/>
+              <a:defRPr sz="2400"/>
+            </a:pPr>
+            <a:r>
+              <a:t>Depiction of gender values: f/female , m/male</a:t>
+            </a:r>
+          </a:p>
+          <a:p>
+            <a:pPr marL="260684" indent="-260684">
+              <a:buSzPct val="100000"/>
+              <a:buChar char="•"/>
+              <a:defRPr sz="2400"/>
+            </a:pPr>
+            <a:r>
+              <a:t>Country and City names: Austria / austria</a:t>
+            </a:r>
+          </a:p>
+          <a:p>
+            <a:pPr marL="260684" indent="-260684">
+              <a:buSzPct val="100000"/>
+              <a:buChar char="•"/>
+              <a:defRPr sz="2400"/>
+            </a:pPr>
+            <a:r>
+              <a:t>Weight and height: kg/no value, cm/m/no value</a:t>
+            </a:r>
+          </a:p>
+          <a:p>
+            <a:pPr marL="260684" indent="-260684">
+              <a:buSzPct val="100000"/>
+              <a:buChar char="•"/>
+              <a:defRPr sz="2400"/>
+            </a:pPr>
+            <a:r>
+              <a:t>Fitness level </a:t>
+            </a:r>
+          </a:p>
+          <a:p>
+            <a:pPr marL="260684" indent="-260684">
+              <a:buSzPct val="100000"/>
+              <a:buChar char="•"/>
+              <a:defRPr sz="2400"/>
+            </a:pPr>
+            <a:r>
+              <a:t>Percentage sign in body fat</a:t>
+            </a:r>
+          </a:p>
+          <a:p>
+            <a:pPr>
+              <a:defRPr sz="2300"/>
+            </a:pPr>
           </a:p>
           <a:p>
             <a:pPr marL="260684" indent="-260684">
@@ -3105,103 +3674,6 @@
               <a:buChar char="•"/>
               <a:defRPr sz="2500"/>
             </a:pPr>
-            <a:r>
-              <a:t>Depiction of gender values: f/female , m/male</a:t>
-            </a:r>
-          </a:p>
-          <a:p>
-            <a:pPr marL="260684" indent="-260684">
-              <a:buSzPct val="100000"/>
-              <a:buChar char="•"/>
-              <a:defRPr sz="2500"/>
-            </a:pPr>
-            <a:r>
-              <a:t>City and country names: Austria / austria</a:t>
-            </a:r>
-          </a:p>
-          <a:p>
-            <a:pPr marL="260684" indent="-260684">
-              <a:buSzPct val="100000"/>
-              <a:buChar char="•"/>
-              <a:defRPr sz="2500"/>
-            </a:pPr>
-            <a:r>
-              <a:t>Weight and height: kg/no value, cm/m/no value</a:t>
-            </a:r>
-          </a:p>
-          <a:p>
-            <a:pPr marL="260684" indent="-260684">
-              <a:buSzPct val="100000"/>
-              <a:buChar char="•"/>
-              <a:defRPr sz="2500"/>
-            </a:pPr>
-            <a:r>
-              <a:t>Save percentage &gt; 100</a:t>
-            </a:r>
-          </a:p>
-          <a:p>
-            <a:pPr marL="260684" indent="-260684">
-              <a:buSzPct val="100000"/>
-              <a:buChar char="•"/>
-              <a:defRPr sz="2500"/>
-            </a:pPr>
-            <a:r>
-              <a:t>Suspicious amount of first names ending in „ius“</a:t>
-            </a:r>
-          </a:p>
-        </p:txBody>
-      </p:sp>
-      <p:sp>
-        <p:nvSpPr>
-          <p:cNvPr id="80" name="Internationals IDs from dataset id_card_0 refactored from roman to Arab numerals"/>
-          <p:cNvSpPr txBox="1"/>
-          <p:nvPr/>
-        </p:nvSpPr>
-        <p:spPr>
-          <a:xfrm>
-            <a:off x="737431" y="4999624"/>
-            <a:ext cx="10473813" cy="421639"/>
-          </a:xfrm>
-          <a:prstGeom prst="rect">
-            <a:avLst/>
-          </a:prstGeom>
-          <a:ln w="12700">
-            <a:miter lim="400000"/>
-          </a:ln>
-          <a:extLst>
-            <a:ext uri="{C572A759-6A51-4108-AA02-DFA0A04FC94B}">
-              <ma14:wrappingTextBoxFlag xmlns:ma14="http://schemas.microsoft.com/office/mac/drawingml/2011/main" val="1"/>
-            </a:ext>
-          </a:extLst>
-        </p:spPr>
-        <p:txBody>
-          <a:bodyPr wrap="none" lIns="45718" tIns="45718" rIns="45718" bIns="45718">
-            <a:spAutoFit/>
-          </a:bodyPr>
-          <a:lstStyle>
-            <a:lvl1pPr marL="228600" indent="-228600" defTabSz="914400">
-              <a:lnSpc>
-                <a:spcPct val="90000"/>
-              </a:lnSpc>
-              <a:spcBef>
-                <a:spcPts val="1000"/>
-              </a:spcBef>
-              <a:buSzPct val="100000"/>
-              <a:buFont typeface="Arial"/>
-              <a:buChar char="•"/>
-              <a:defRPr sz="2200">
-                <a:latin typeface="Aptos"/>
-                <a:ea typeface="Aptos"/>
-                <a:cs typeface="Aptos"/>
-                <a:sym typeface="Aptos"/>
-              </a:defRPr>
-            </a:lvl1pPr>
-          </a:lstStyle>
-          <a:p>
-            <a:pPr/>
-            <a:r>
-              <a:t>Internationals IDs from dataset id_card_0 refactored from roman to Arab numerals</a:t>
-            </a:r>
           </a:p>
         </p:txBody>
       </p:sp>
@@ -3233,20 +3705,66 @@
       </p:grpSpPr>
       <p:sp>
         <p:nvSpPr>
-          <p:cNvPr id="82" name="Foliennummernplatzhalter 5"/>
+          <p:cNvPr id="87" name="Zum Bearbeiten doppelklicken"/>
           <p:cNvSpPr txBox="1"/>
           <p:nvPr>
-            <p:ph type="sldNum" sz="quarter" idx="4294967295"/>
+            <p:ph type="body" sz="quarter" idx="1"/>
           </p:nvPr>
         </p:nvSpPr>
         <p:spPr>
+          <a:prstGeom prst="rect">
+            <a:avLst/>
+          </a:prstGeom>
+        </p:spPr>
+        <p:txBody>
+          <a:bodyPr/>
+          <a:lstStyle/>
+          <a:p>
+            <a:pPr/>
+          </a:p>
+        </p:txBody>
+      </p:sp>
+      <p:sp>
+        <p:nvSpPr>
+          <p:cNvPr id="88" name="Preprocessing"/>
+          <p:cNvSpPr txBox="1"/>
+          <p:nvPr>
+            <p:ph type="title"/>
+          </p:nvPr>
+        </p:nvSpPr>
+        <p:spPr>
+          <a:prstGeom prst="rect">
+            <a:avLst/>
+          </a:prstGeom>
+        </p:spPr>
+        <p:txBody>
+          <a:bodyPr/>
+          <a:lstStyle/>
+          <a:p>
+            <a:pPr/>
+            <a:r>
+              <a:t>Preprocessing</a:t>
+            </a:r>
+          </a:p>
+        </p:txBody>
+      </p:sp>
+      <p:sp>
+        <p:nvSpPr>
+          <p:cNvPr id="89" name="Identified quality issues in the data:…"/>
+          <p:cNvSpPr txBox="1"/>
+          <p:nvPr/>
+        </p:nvSpPr>
+        <p:spPr>
           <a:xfrm>
-            <a:off x="241985" y="924083"/>
-            <a:ext cx="127001" cy="197384"/>
+            <a:off x="809357" y="1590590"/>
+            <a:ext cx="11709966" cy="3776979"/>
           </a:xfrm>
           <a:prstGeom prst="rect">
             <a:avLst/>
           </a:prstGeom>
+          <a:ln w="12700">
+            <a:miter lim="400000"/>
+          </a:ln>
           <a:extLst>
             <a:ext uri="{C572A759-6A51-4108-AA02-DFA0A04FC94B}">
               <ma14:wrappingTextBoxFlag xmlns:ma14="http://schemas.microsoft.com/office/mac/drawingml/2011/main" val="1"/>
@@ -3254,64 +3772,85 @@
           </a:extLst>
         </p:spPr>
         <p:txBody>
-          <a:bodyPr/>
+          <a:bodyPr wrap="none" lIns="45718" tIns="45718" rIns="45718" bIns="45718">
+            <a:spAutoFit/>
+          </a:bodyPr>
           <a:lstStyle/>
           <a:p>
             <a:pPr/>
-            <a:fld id="{86CB4B4D-7CA3-9044-876B-883B54F8677D}" type="slidenum"/>
-          </a:p>
-        </p:txBody>
-      </p:sp>
-      <p:sp>
-        <p:nvSpPr>
-          <p:cNvPr id="83" name="Titel 1"/>
-          <p:cNvSpPr txBox="1"/>
-          <p:nvPr>
-            <p:ph type="title"/>
-          </p:nvPr>
-        </p:nvSpPr>
-        <p:spPr>
-          <a:xfrm>
-            <a:off x="880588" y="884237"/>
-            <a:ext cx="11876400" cy="614118"/>
-          </a:xfrm>
-          <a:prstGeom prst="rect">
-            <a:avLst/>
-          </a:prstGeom>
-        </p:spPr>
-        <p:txBody>
-          <a:bodyPr/>
-          <a:lstStyle/>
-          <a:p>
-            <a:pPr/>
-            <a:r>
-              <a:t>Data relationships</a:t>
-            </a:r>
-          </a:p>
-        </p:txBody>
-      </p:sp>
-      <p:sp>
-        <p:nvSpPr>
-          <p:cNvPr id="84" name="Textplatzhalter 2"/>
-          <p:cNvSpPr txBox="1"/>
-          <p:nvPr>
-            <p:ph type="body" sz="quarter" idx="1"/>
-          </p:nvPr>
-        </p:nvSpPr>
-        <p:spPr>
-          <a:xfrm>
-            <a:off x="880588" y="349996"/>
-            <a:ext cx="10187500" cy="286723"/>
-          </a:xfrm>
-          <a:prstGeom prst="rect">
-            <a:avLst/>
-          </a:prstGeom>
-        </p:spPr>
-        <p:txBody>
-          <a:bodyPr/>
-          <a:lstStyle/>
-          <a:p>
-            <a:pPr/>
+            <a:r>
+              <a:t>Identified quality issues in the data:</a:t>
+            </a:r>
+          </a:p>
+          <a:p>
+            <a:pPr marL="260684" indent="-260684">
+              <a:buSzPct val="100000"/>
+              <a:buChar char="•"/>
+            </a:pPr>
+            <a:r>
+              <a:t>Save percentages greater than 100</a:t>
+            </a:r>
+          </a:p>
+          <a:p>
+            <a:pPr marL="260684" indent="-260684">
+              <a:buSzPct val="100000"/>
+              <a:buChar char="•"/>
+            </a:pPr>
+            <a:r>
+              <a:t>Suspicious amount of first names ending in „ius“</a:t>
+            </a:r>
+          </a:p>
+          <a:p>
+            <a:pPr marL="260684" indent="-260684">
+              <a:buSzPct val="100000"/>
+              <a:buChar char="•"/>
+            </a:pPr>
+            <a:r>
+              <a:t>International ids in roman numerals</a:t>
+            </a:r>
+          </a:p>
+          <a:p>
+            <a:pPr marL="260684" indent="-260684">
+              <a:buSzPct val="100000"/>
+              <a:buChar char="•"/>
+            </a:pPr>
+            <a:r>
+              <a:t>37 rows with missing values</a:t>
+            </a:r>
+          </a:p>
+          <a:p>
+            <a:pPr marL="260684" indent="-260684">
+              <a:buSzPct val="100000"/>
+              <a:buChar char="•"/>
+            </a:pPr>
+            <a:r>
+              <a:t>Age outliers found upon inspection, decided on upper bound of oldest person </a:t>
+            </a:r>
+          </a:p>
+          <a:p>
+            <a:pPr marL="260684" indent="-260684">
+              <a:buSzPct val="100000"/>
+              <a:buChar char="•"/>
+            </a:pPr>
+            <a:r>
+              <a:t>alive due to diversity encouragement </a:t>
+            </a:r>
+          </a:p>
+          <a:p>
+            <a:pPr defTabSz="914400">
+              <a:lnSpc>
+                <a:spcPct val="90000"/>
+              </a:lnSpc>
+              <a:spcBef>
+                <a:spcPts val="1000"/>
+              </a:spcBef>
+              <a:defRPr sz="2300">
+                <a:latin typeface="Aptos"/>
+                <a:ea typeface="Aptos"/>
+                <a:cs typeface="Aptos"/>
+                <a:sym typeface="Aptos"/>
+              </a:defRPr>
+            </a:pPr>
           </a:p>
         </p:txBody>
       </p:sp>
@@ -3343,7 +3882,7 @@
       </p:grpSpPr>
       <p:sp>
         <p:nvSpPr>
-          <p:cNvPr id="86" name="Foliennummernplatzhalter 5"/>
+          <p:cNvPr id="91" name="Foliennummernplatzhalter 5"/>
           <p:cNvSpPr txBox="1"/>
           <p:nvPr>
             <p:ph type="sldNum" sz="quarter" idx="4294967295"/>
@@ -3374,7 +3913,7 @@
       </p:sp>
       <p:sp>
         <p:nvSpPr>
-          <p:cNvPr id="87" name="Titel 1"/>
+          <p:cNvPr id="92" name="Titel 1"/>
           <p:cNvSpPr txBox="1"/>
           <p:nvPr>
             <p:ph type="title"/>
@@ -3383,7 +3922,7 @@
         <p:spPr>
           <a:xfrm>
             <a:off x="880588" y="884237"/>
-            <a:ext cx="11876400" cy="1220402"/>
+            <a:ext cx="11876400" cy="614118"/>
           </a:xfrm>
           <a:prstGeom prst="rect">
             <a:avLst/>
@@ -3402,7 +3941,7 @@
       </p:sp>
       <p:sp>
         <p:nvSpPr>
-          <p:cNvPr id="88" name="Textplatzhalter 2"/>
+          <p:cNvPr id="93" name="Textplatzhalter 2"/>
           <p:cNvSpPr txBox="1"/>
           <p:nvPr>
             <p:ph type="body" sz="quarter" idx="1"/>
@@ -3453,7 +3992,38 @@
       </p:grpSpPr>
       <p:sp>
         <p:nvSpPr>
-          <p:cNvPr id="90" name="Data cleaning"/>
+          <p:cNvPr id="95" name="Foliennummernplatzhalter 5"/>
+          <p:cNvSpPr txBox="1"/>
+          <p:nvPr>
+            <p:ph type="sldNum" sz="quarter" idx="4294967295"/>
+          </p:nvPr>
+        </p:nvSpPr>
+        <p:spPr>
+          <a:xfrm>
+            <a:off x="241985" y="924083"/>
+            <a:ext cx="127001" cy="197384"/>
+          </a:xfrm>
+          <a:prstGeom prst="rect">
+            <a:avLst/>
+          </a:prstGeom>
+          <a:extLst>
+            <a:ext uri="{C572A759-6A51-4108-AA02-DFA0A04FC94B}">
+              <ma14:wrappingTextBoxFlag xmlns:ma14="http://schemas.microsoft.com/office/mac/drawingml/2011/main" val="1"/>
+            </a:ext>
+          </a:extLst>
+        </p:spPr>
+        <p:txBody>
+          <a:bodyPr/>
+          <a:lstStyle/>
+          <a:p>
+            <a:pPr/>
+            <a:fld id="{86CB4B4D-7CA3-9044-876B-883B54F8677D}" type="slidenum"/>
+          </a:p>
+        </p:txBody>
+      </p:sp>
+      <p:sp>
+        <p:nvSpPr>
+          <p:cNvPr id="96" name="Titel 1"/>
           <p:cNvSpPr txBox="1"/>
           <p:nvPr>
             <p:ph type="title"/>
@@ -3462,7 +4032,7 @@
         <p:spPr>
           <a:xfrm>
             <a:off x="880588" y="884237"/>
-            <a:ext cx="11876400" cy="614118"/>
+            <a:ext cx="11876400" cy="1220402"/>
           </a:xfrm>
           <a:prstGeom prst="rect">
             <a:avLst/>
@@ -3474,14 +4044,14 @@
           <a:p>
             <a:pPr/>
             <a:r>
-              <a:t>Data cleaning</a:t>
+              <a:t>Data relationships</a:t>
             </a:r>
           </a:p>
         </p:txBody>
       </p:sp>
       <p:sp>
         <p:nvSpPr>
-          <p:cNvPr id="91" name="Zum Bearbeiten doppelklicken"/>
+          <p:cNvPr id="97" name="Textplatzhalter 2"/>
           <p:cNvSpPr txBox="1"/>
           <p:nvPr>
             <p:ph type="body" sz="quarter" idx="1"/>
@@ -3501,253 +4071,6 @@
           <a:lstStyle/>
           <a:p>
             <a:pPr/>
-          </a:p>
-        </p:txBody>
-      </p:sp>
-      <p:sp>
-        <p:nvSpPr>
-          <p:cNvPr id="92" name="Foliennummer"/>
-          <p:cNvSpPr txBox="1"/>
-          <p:nvPr>
-            <p:ph type="sldNum" sz="quarter" idx="4294967295"/>
-          </p:nvPr>
-        </p:nvSpPr>
-        <p:spPr>
-          <a:xfrm>
-            <a:off x="241984" y="924083"/>
-            <a:ext cx="127001" cy="197384"/>
-          </a:xfrm>
-          <a:prstGeom prst="rect">
-            <a:avLst/>
-          </a:prstGeom>
-          <a:extLst>
-            <a:ext uri="{C572A759-6A51-4108-AA02-DFA0A04FC94B}">
-              <ma14:wrappingTextBoxFlag xmlns:ma14="http://schemas.microsoft.com/office/mac/drawingml/2011/main" val="1"/>
-            </a:ext>
-          </a:extLst>
-        </p:spPr>
-        <p:txBody>
-          <a:bodyPr/>
-          <a:lstStyle/>
-          <a:p>
-            <a:pPr/>
-            <a:fld id="{86CB4B4D-7CA3-9044-876B-883B54F8677D}" type="slidenum"/>
-          </a:p>
-        </p:txBody>
-      </p:sp>
-      <p:sp>
-        <p:nvSpPr>
-          <p:cNvPr id="93" name="We first looked at each Dataset separately to identify problems:…"/>
-          <p:cNvSpPr txBox="1"/>
-          <p:nvPr/>
-        </p:nvSpPr>
-        <p:spPr>
-          <a:xfrm>
-            <a:off x="196729" y="1663700"/>
-            <a:ext cx="12969239" cy="4391659"/>
-          </a:xfrm>
-          <a:prstGeom prst="rect">
-            <a:avLst/>
-          </a:prstGeom>
-          <a:ln w="12700">
-            <a:miter lim="400000"/>
-          </a:ln>
-          <a:extLst>
-            <a:ext uri="{C572A759-6A51-4108-AA02-DFA0A04FC94B}">
-              <ma14:wrappingTextBoxFlag xmlns:ma14="http://schemas.microsoft.com/office/mac/drawingml/2011/main" val="1"/>
-            </a:ext>
-          </a:extLst>
-        </p:spPr>
-        <p:txBody>
-          <a:bodyPr wrap="none" lIns="45718" tIns="45718" rIns="45718" bIns="45718">
-            <a:spAutoFit/>
-          </a:bodyPr>
-          <a:lstStyle/>
-          <a:p>
-            <a:pPr>
-              <a:defRPr sz="2500">
-                <a:latin typeface="Arial"/>
-                <a:ea typeface="Arial"/>
-                <a:cs typeface="Arial"/>
-                <a:sym typeface="Arial"/>
-              </a:defRPr>
-            </a:pPr>
-            <a:r>
-              <a:t>First consider each Dataset separately to identify problems:</a:t>
-            </a:r>
-          </a:p>
-          <a:p>
-            <a:pPr marL="228600" indent="-228600" defTabSz="914400">
-              <a:lnSpc>
-                <a:spcPct val="90000"/>
-              </a:lnSpc>
-              <a:spcBef>
-                <a:spcPts val="1000"/>
-              </a:spcBef>
-              <a:buSzPct val="100000"/>
-              <a:buFont typeface="Arial"/>
-              <a:buChar char="•"/>
-              <a:defRPr sz="2300">
-                <a:latin typeface="Aptos"/>
-                <a:ea typeface="Aptos"/>
-                <a:cs typeface="Aptos"/>
-                <a:sym typeface="Aptos"/>
-              </a:defRPr>
-            </a:pPr>
-            <a:r>
-              <a:t>Identity_card: </a:t>
-            </a:r>
-          </a:p>
-          <a:p>
-            <a:pPr lvl="1" marL="685800" indent="-228600" defTabSz="914400">
-              <a:lnSpc>
-                <a:spcPct val="90000"/>
-              </a:lnSpc>
-              <a:spcBef>
-                <a:spcPts val="1000"/>
-              </a:spcBef>
-              <a:buSzPct val="100000"/>
-              <a:buFont typeface="Arial"/>
-              <a:buChar char="•"/>
-              <a:defRPr sz="2300">
-                <a:latin typeface="Aptos"/>
-                <a:ea typeface="Aptos"/>
-                <a:cs typeface="Aptos"/>
-                <a:sym typeface="Aptos"/>
-              </a:defRPr>
-            </a:pPr>
-            <a:r>
-              <a:t>birth city and nationality often didn’t match, for clarity decided to drop birth city due to </a:t>
-            </a:r>
-          </a:p>
-          <a:p>
-            <a:pPr lvl="3" indent="685800" defTabSz="914400">
-              <a:lnSpc>
-                <a:spcPct val="90000"/>
-              </a:lnSpc>
-              <a:spcBef>
-                <a:spcPts val="1000"/>
-              </a:spcBef>
-              <a:defRPr sz="2300">
-                <a:latin typeface="Aptos"/>
-                <a:ea typeface="Aptos"/>
-                <a:cs typeface="Aptos"/>
-                <a:sym typeface="Aptos"/>
-              </a:defRPr>
-            </a:pPr>
-            <a:r>
-              <a:t>higher relevance of nationality for player’s visas etc. </a:t>
-            </a:r>
-          </a:p>
-          <a:p>
-            <a:pPr lvl="1" marL="685800" indent="-228600" defTabSz="914400">
-              <a:lnSpc>
-                <a:spcPct val="90000"/>
-              </a:lnSpc>
-              <a:spcBef>
-                <a:spcPts val="1000"/>
-              </a:spcBef>
-              <a:buSzPct val="100000"/>
-              <a:buFont typeface="Arial"/>
-              <a:buChar char="•"/>
-              <a:defRPr sz="2300">
-                <a:latin typeface="Aptos"/>
-                <a:ea typeface="Aptos"/>
-                <a:cs typeface="Aptos"/>
-                <a:sym typeface="Aptos"/>
-              </a:defRPr>
-            </a:pPr>
-            <a:r>
-              <a:t>Age outliers found upon inspection, up to ≈300 years old, decided on the upper bound of 122  the oldest person alive on earth (122 years)</a:t>
-            </a:r>
-          </a:p>
-          <a:p>
-            <a:pPr marL="228600" indent="-228600" defTabSz="914400">
-              <a:lnSpc>
-                <a:spcPct val="90000"/>
-              </a:lnSpc>
-              <a:spcBef>
-                <a:spcPts val="1000"/>
-              </a:spcBef>
-              <a:buSzPct val="100000"/>
-              <a:buFont typeface="Arial"/>
-              <a:buChar char="•"/>
-              <a:defRPr sz="2300">
-                <a:latin typeface="Aptos"/>
-                <a:ea typeface="Aptos"/>
-                <a:cs typeface="Aptos"/>
-                <a:sym typeface="Aptos"/>
-              </a:defRPr>
-            </a:pPr>
-            <a:r>
-              <a:t>Scouting notes:</a:t>
-            </a:r>
-          </a:p>
-          <a:p>
-            <a:pPr lvl="1" marL="685800" indent="-228600" defTabSz="914400">
-              <a:lnSpc>
-                <a:spcPct val="90000"/>
-              </a:lnSpc>
-              <a:spcBef>
-                <a:spcPts val="1000"/>
-              </a:spcBef>
-              <a:buSzPct val="100000"/>
-              <a:buFont typeface="Arial"/>
-              <a:buChar char="•"/>
-              <a:defRPr sz="2300">
-                <a:latin typeface="Aptos"/>
-                <a:ea typeface="Aptos"/>
-                <a:cs typeface="Aptos"/>
-                <a:sym typeface="Aptos"/>
-              </a:defRPr>
-            </a:pPr>
-            <a:r>
-              <a:t>Some players had more years pro than years played in general, decided to drop those</a:t>
-            </a:r>
-          </a:p>
-          <a:p>
-            <a:pPr lvl="1" marL="685800" indent="-228600" defTabSz="914400">
-              <a:lnSpc>
-                <a:spcPct val="90000"/>
-              </a:lnSpc>
-              <a:spcBef>
-                <a:spcPts val="1000"/>
-              </a:spcBef>
-              <a:buSzPct val="100000"/>
-              <a:buFont typeface="Arial"/>
-              <a:buChar char="•"/>
-              <a:defRPr sz="2300">
-                <a:latin typeface="Aptos"/>
-                <a:ea typeface="Aptos"/>
-                <a:cs typeface="Aptos"/>
-                <a:sym typeface="Aptos"/>
-              </a:defRPr>
-            </a:pPr>
-            <a:r>
-              <a:t>Dropped players with 0 years of experience but experience level higher than rookie </a:t>
-            </a:r>
-          </a:p>
-          <a:p>
-            <a:pPr lvl="1" marL="685800" indent="-228600" defTabSz="914400">
-              <a:lnSpc>
-                <a:spcPct val="90000"/>
-              </a:lnSpc>
-              <a:spcBef>
-                <a:spcPts val="1000"/>
-              </a:spcBef>
-              <a:buSzPct val="100000"/>
-              <a:buFont typeface="Arial"/>
-              <a:buChar char="•"/>
-              <a:defRPr sz="2300">
-                <a:latin typeface="Aptos"/>
-                <a:ea typeface="Aptos"/>
-                <a:cs typeface="Aptos"/>
-                <a:sym typeface="Aptos"/>
-              </a:defRPr>
-            </a:pPr>
-            <a:r>
-              <a:t>Filled NaN values for scout notes with „no notes“ and for dominant hand with „none“</a:t>
-            </a:r>
           </a:p>
         </p:txBody>
       </p:sp>
@@ -3779,7 +4102,7 @@
       </p:grpSpPr>
       <p:sp>
         <p:nvSpPr>
-          <p:cNvPr id="95" name="Data cleaning"/>
+          <p:cNvPr id="99" name="Data cleaning"/>
           <p:cNvSpPr txBox="1"/>
           <p:nvPr>
             <p:ph type="title"/>
@@ -3796,7 +4119,15 @@
         </p:spPr>
         <p:txBody>
           <a:bodyPr/>
-          <a:lstStyle/>
+          <a:lstStyle>
+            <a:lvl1pPr>
+              <a:defRPr>
+                <a:solidFill>
+                  <a:srgbClr val="040102"/>
+                </a:solidFill>
+              </a:defRPr>
+            </a:lvl1pPr>
+          </a:lstStyle>
           <a:p>
             <a:pPr/>
             <a:r>
@@ -3807,7 +4138,7 @@
       </p:sp>
       <p:sp>
         <p:nvSpPr>
-          <p:cNvPr id="96" name="Zum Bearbeiten doppelklicken"/>
+          <p:cNvPr id="100" name="Zum Bearbeiten doppelklicken"/>
           <p:cNvSpPr txBox="1"/>
           <p:nvPr>
             <p:ph type="body" sz="quarter" idx="1"/>
@@ -3832,7 +4163,7 @@
       </p:sp>
       <p:sp>
         <p:nvSpPr>
-          <p:cNvPr id="97" name="Foliennummer"/>
+          <p:cNvPr id="101" name="Foliennummer"/>
           <p:cNvSpPr txBox="1"/>
           <p:nvPr>
             <p:ph type="sldNum" sz="quarter" idx="4294967295"/>
@@ -3863,14 +4194,14 @@
       </p:sp>
       <p:sp>
         <p:nvSpPr>
-          <p:cNvPr id="98" name="Performance:…"/>
+          <p:cNvPr id="102" name="We first looked at each Dataset separately to identify problems:…"/>
           <p:cNvSpPr txBox="1"/>
           <p:nvPr/>
         </p:nvSpPr>
         <p:spPr>
           <a:xfrm>
-            <a:off x="500614" y="1778013"/>
-            <a:ext cx="12307164" cy="5298439"/>
+            <a:off x="196729" y="1663700"/>
+            <a:ext cx="12969239" cy="4391659"/>
           </a:xfrm>
           <a:prstGeom prst="rect">
             <a:avLst/>
@@ -3890,108 +4221,190 @@
           </a:bodyPr>
           <a:lstStyle/>
           <a:p>
-            <a:pPr marL="260684" indent="-260684">
+            <a:pPr>
+              <a:defRPr sz="2500">
+                <a:latin typeface="Arial"/>
+                <a:ea typeface="Arial"/>
+                <a:cs typeface="Arial"/>
+                <a:sym typeface="Arial"/>
+              </a:defRPr>
+            </a:pPr>
+            <a:r>
+              <a:t>First consider each Dataset separately to identify problems:</a:t>
+            </a:r>
+          </a:p>
+          <a:p>
+            <a:pPr marL="228600" indent="-228600" defTabSz="914400">
+              <a:lnSpc>
+                <a:spcPct val="90000"/>
+              </a:lnSpc>
+              <a:spcBef>
+                <a:spcPts val="1000"/>
+              </a:spcBef>
               <a:buSzPct val="100000"/>
+              <a:buFont typeface="Arial"/>
               <a:buChar char="•"/>
-              <a:defRPr sz="2300"/>
-            </a:pPr>
-            <a:r>
-              <a:t>Performance:</a:t>
-            </a:r>
-          </a:p>
-          <a:p>
-            <a:pPr lvl="1" marL="641684" indent="-260684">
+              <a:defRPr sz="2300">
+                <a:latin typeface="Aptos"/>
+                <a:ea typeface="Aptos"/>
+                <a:cs typeface="Aptos"/>
+                <a:sym typeface="Aptos"/>
+              </a:defRPr>
+            </a:pPr>
+            <a:r>
+              <a:t>Identity_card: </a:t>
+            </a:r>
+          </a:p>
+          <a:p>
+            <a:pPr lvl="1" marL="685800" indent="-228600" defTabSz="914400">
+              <a:lnSpc>
+                <a:spcPct val="90000"/>
+              </a:lnSpc>
+              <a:spcBef>
+                <a:spcPts val="1000"/>
+              </a:spcBef>
               <a:buSzPct val="100000"/>
+              <a:buFont typeface="Arial"/>
               <a:buChar char="•"/>
-              <a:defRPr sz="2300"/>
-            </a:pPr>
-            <a:r>
-              <a:t>Puck touches, time between penalties and goals total were dropped due to inconsistency </a:t>
-            </a:r>
-          </a:p>
-          <a:p>
-            <a:pPr lvl="1" indent="228600">
-              <a:defRPr sz="2300"/>
-            </a:pPr>
-            <a:r>
-              <a:t>     with other columns </a:t>
-            </a:r>
-          </a:p>
-          <a:p>
-            <a:pPr lvl="1" marL="641684" indent="-260684">
+              <a:defRPr sz="2300">
+                <a:latin typeface="Aptos"/>
+                <a:ea typeface="Aptos"/>
+                <a:cs typeface="Aptos"/>
+                <a:sym typeface="Aptos"/>
+              </a:defRPr>
+            </a:pPr>
+            <a:r>
+              <a:t>birth city and nationality often didn’t match, for clarity decided to drop birth city due to </a:t>
+            </a:r>
+          </a:p>
+          <a:p>
+            <a:pPr lvl="3" indent="685800" defTabSz="914400">
+              <a:lnSpc>
+                <a:spcPct val="90000"/>
+              </a:lnSpc>
+              <a:spcBef>
+                <a:spcPts val="1000"/>
+              </a:spcBef>
+              <a:defRPr sz="2300">
+                <a:latin typeface="Aptos"/>
+                <a:ea typeface="Aptos"/>
+                <a:cs typeface="Aptos"/>
+                <a:sym typeface="Aptos"/>
+              </a:defRPr>
+            </a:pPr>
+            <a:r>
+              <a:t>higher relevance of nationality for player’s visas etc. </a:t>
+            </a:r>
+          </a:p>
+          <a:p>
+            <a:pPr lvl="1" marL="685800" indent="-228600" defTabSz="914400">
+              <a:lnSpc>
+                <a:spcPct val="90000"/>
+              </a:lnSpc>
+              <a:spcBef>
+                <a:spcPts val="1000"/>
+              </a:spcBef>
               <a:buSzPct val="100000"/>
+              <a:buFont typeface="Arial"/>
               <a:buChar char="•"/>
-              <a:defRPr sz="2300"/>
-            </a:pPr>
-            <a:r>
-              <a:t>puck possession time reformatted from minutes to seconds </a:t>
-            </a:r>
-          </a:p>
-          <a:p>
-            <a:pPr lvl="1" marL="641684" indent="-260684">
+              <a:defRPr sz="2300">
+                <a:latin typeface="Aptos"/>
+                <a:ea typeface="Aptos"/>
+                <a:cs typeface="Aptos"/>
+                <a:sym typeface="Aptos"/>
+              </a:defRPr>
+            </a:pPr>
+            <a:r>
+              <a:t>Age outliers found upon inspection, up to ≈300 years old, decided on the upper bound of 122  the oldest person alive on earth (122 years)</a:t>
+            </a:r>
+          </a:p>
+          <a:p>
+            <a:pPr marL="228600" indent="-228600" defTabSz="914400">
+              <a:lnSpc>
+                <a:spcPct val="90000"/>
+              </a:lnSpc>
+              <a:spcBef>
+                <a:spcPts val="1000"/>
+              </a:spcBef>
               <a:buSzPct val="100000"/>
+              <a:buFont typeface="Arial"/>
               <a:buChar char="•"/>
-              <a:defRPr sz="2300"/>
-            </a:pPr>
-            <a:r>
-              <a:t>Set penalty minutes to 0 for players without any saved penalties </a:t>
-            </a:r>
-          </a:p>
-          <a:p>
-            <a:pPr lvl="1" marL="641684" indent="-260684">
+              <a:defRPr sz="2300">
+                <a:latin typeface="Aptos"/>
+                <a:ea typeface="Aptos"/>
+                <a:cs typeface="Aptos"/>
+                <a:sym typeface="Aptos"/>
+              </a:defRPr>
+            </a:pPr>
+            <a:r>
+              <a:t>Scouting notes:</a:t>
+            </a:r>
+          </a:p>
+          <a:p>
+            <a:pPr lvl="1" marL="685800" indent="-228600" defTabSz="914400">
+              <a:lnSpc>
+                <a:spcPct val="90000"/>
+              </a:lnSpc>
+              <a:spcBef>
+                <a:spcPts val="1000"/>
+              </a:spcBef>
               <a:buSzPct val="100000"/>
+              <a:buFont typeface="Arial"/>
               <a:buChar char="•"/>
-              <a:defRPr sz="2300"/>
-            </a:pPr>
-            <a:r>
-              <a:t>Newly calculated shooting percentage since values beforehand didn’t seem </a:t>
-            </a:r>
-          </a:p>
-          <a:p>
-            <a:pPr lvl="2" indent="457200">
-              <a:defRPr sz="2300"/>
-            </a:pPr>
-            <a:r>
-              <a:t>  sensible -&gt; Equation: shooting percentage = goals/ number of shots * 100</a:t>
-            </a:r>
-          </a:p>
-          <a:p>
-            <a:pPr lvl="2" indent="457200">
-              <a:defRPr sz="2300"/>
-            </a:pPr>
-          </a:p>
-          <a:p>
-            <a:pPr marL="260684" indent="-260684">
+              <a:defRPr sz="2300">
+                <a:latin typeface="Aptos"/>
+                <a:ea typeface="Aptos"/>
+                <a:cs typeface="Aptos"/>
+                <a:sym typeface="Aptos"/>
+              </a:defRPr>
+            </a:pPr>
+            <a:r>
+              <a:t>Some players had more years pro than years played in general, these were dropped</a:t>
+            </a:r>
+          </a:p>
+          <a:p>
+            <a:pPr lvl="1" marL="685800" indent="-228600" defTabSz="914400">
+              <a:lnSpc>
+                <a:spcPct val="90000"/>
+              </a:lnSpc>
+              <a:spcBef>
+                <a:spcPts val="1000"/>
+              </a:spcBef>
               <a:buSzPct val="100000"/>
+              <a:buFont typeface="Arial"/>
               <a:buChar char="•"/>
-            </a:pPr>
-            <a:r>
-              <a:t>Medical </a:t>
-            </a:r>
-          </a:p>
-          <a:p>
-            <a:pPr lvl="1" marL="641684" indent="-260684">
+              <a:defRPr sz="2300">
+                <a:latin typeface="Aptos"/>
+                <a:ea typeface="Aptos"/>
+                <a:cs typeface="Aptos"/>
+                <a:sym typeface="Aptos"/>
+              </a:defRPr>
+            </a:pPr>
+            <a:r>
+              <a:t>Dropped players with 0 years of experience but experience level higher than rookie </a:t>
+            </a:r>
+          </a:p>
+          <a:p>
+            <a:pPr lvl="1" marL="685800" indent="-228600" defTabSz="914400">
+              <a:lnSpc>
+                <a:spcPct val="90000"/>
+              </a:lnSpc>
+              <a:spcBef>
+                <a:spcPts val="1000"/>
+              </a:spcBef>
               <a:buSzPct val="100000"/>
+              <a:buFont typeface="Arial"/>
               <a:buChar char="•"/>
-            </a:pPr>
-          </a:p>
-          <a:p>
-            <a:pPr lvl="1" marL="641684" indent="-260684">
-              <a:buSzPct val="100000"/>
-              <a:buChar char="•"/>
-            </a:pPr>
-          </a:p>
-          <a:p>
-            <a:pPr lvl="1" marL="641684" indent="-260684">
-              <a:buSzPct val="100000"/>
-              <a:buChar char="•"/>
-            </a:pPr>
-          </a:p>
-          <a:p>
-            <a:pPr marL="260684" indent="-260684">
-              <a:buSzPct val="100000"/>
-              <a:buChar char="•"/>
-            </a:pPr>
+              <a:defRPr sz="2300">
+                <a:latin typeface="Aptos"/>
+                <a:ea typeface="Aptos"/>
+                <a:cs typeface="Aptos"/>
+                <a:sym typeface="Aptos"/>
+              </a:defRPr>
+            </a:pPr>
+            <a:r>
+              <a:t>Filled NaN values for scout notes with „no notes“ and for dominant hand with „none“</a:t>
+            </a:r>
           </a:p>
         </p:txBody>
       </p:sp>
@@ -4023,7 +4436,7 @@
       </p:grpSpPr>
       <p:sp>
         <p:nvSpPr>
-          <p:cNvPr id="100" name="Most important findings"/>
+          <p:cNvPr id="104" name="Data cleaning"/>
           <p:cNvSpPr txBox="1"/>
           <p:nvPr>
             <p:ph type="title"/>
@@ -4040,18 +4453,26 @@
         </p:spPr>
         <p:txBody>
           <a:bodyPr/>
-          <a:lstStyle/>
+          <a:lstStyle>
+            <a:lvl1pPr>
+              <a:defRPr>
+                <a:solidFill>
+                  <a:srgbClr val="040102"/>
+                </a:solidFill>
+              </a:defRPr>
+            </a:lvl1pPr>
+          </a:lstStyle>
           <a:p>
             <a:pPr/>
             <a:r>
-              <a:t>Most important findings</a:t>
+              <a:t>Data cleaning</a:t>
             </a:r>
           </a:p>
         </p:txBody>
       </p:sp>
       <p:sp>
         <p:nvSpPr>
-          <p:cNvPr id="101" name="Zum Bearbeiten doppelklicken"/>
+          <p:cNvPr id="105" name="Zum Bearbeiten doppelklicken"/>
           <p:cNvSpPr txBox="1"/>
           <p:nvPr>
             <p:ph type="body" sz="quarter" idx="1"/>
@@ -4076,7 +4497,7 @@
       </p:sp>
       <p:sp>
         <p:nvSpPr>
-          <p:cNvPr id="102" name="Foliennummer"/>
+          <p:cNvPr id="106" name="Foliennummer"/>
           <p:cNvSpPr txBox="1"/>
           <p:nvPr>
             <p:ph type="sldNum" sz="quarter" idx="4294967295"/>
@@ -4102,6 +4523,140 @@
           <a:p>
             <a:pPr/>
             <a:fld id="{86CB4B4D-7CA3-9044-876B-883B54F8677D}" type="slidenum"/>
+          </a:p>
+        </p:txBody>
+      </p:sp>
+      <p:sp>
+        <p:nvSpPr>
+          <p:cNvPr id="107" name="Performance:…"/>
+          <p:cNvSpPr txBox="1"/>
+          <p:nvPr/>
+        </p:nvSpPr>
+        <p:spPr>
+          <a:xfrm>
+            <a:off x="500614" y="1778013"/>
+            <a:ext cx="12307164" cy="5298439"/>
+          </a:xfrm>
+          <a:prstGeom prst="rect">
+            <a:avLst/>
+          </a:prstGeom>
+          <a:ln w="12700">
+            <a:miter lim="400000"/>
+          </a:ln>
+          <a:extLst>
+            <a:ext uri="{C572A759-6A51-4108-AA02-DFA0A04FC94B}">
+              <ma14:wrappingTextBoxFlag xmlns:ma14="http://schemas.microsoft.com/office/mac/drawingml/2011/main" val="1"/>
+            </a:ext>
+          </a:extLst>
+        </p:spPr>
+        <p:txBody>
+          <a:bodyPr wrap="none" lIns="45718" tIns="45718" rIns="45718" bIns="45718">
+            <a:spAutoFit/>
+          </a:bodyPr>
+          <a:lstStyle/>
+          <a:p>
+            <a:pPr marL="260684" indent="-260684">
+              <a:buSzPct val="100000"/>
+              <a:buChar char="•"/>
+              <a:defRPr sz="2300"/>
+            </a:pPr>
+            <a:r>
+              <a:t>Performance:</a:t>
+            </a:r>
+          </a:p>
+          <a:p>
+            <a:pPr lvl="1" marL="641684" indent="-260684">
+              <a:buSzPct val="100000"/>
+              <a:buChar char="•"/>
+              <a:defRPr sz="2300"/>
+            </a:pPr>
+            <a:r>
+              <a:t>Puck touches, time between penalties and goals total were dropped due to inconsistency </a:t>
+            </a:r>
+          </a:p>
+          <a:p>
+            <a:pPr lvl="1" indent="228600">
+              <a:defRPr sz="2300"/>
+            </a:pPr>
+            <a:r>
+              <a:t>     with other columns </a:t>
+            </a:r>
+          </a:p>
+          <a:p>
+            <a:pPr lvl="1" marL="641684" indent="-260684">
+              <a:buSzPct val="100000"/>
+              <a:buChar char="•"/>
+              <a:defRPr sz="2300"/>
+            </a:pPr>
+            <a:r>
+              <a:t>puck possession time reformatted from minutes to seconds </a:t>
+            </a:r>
+          </a:p>
+          <a:p>
+            <a:pPr lvl="1" marL="641684" indent="-260684">
+              <a:buSzPct val="100000"/>
+              <a:buChar char="•"/>
+              <a:defRPr sz="2300"/>
+            </a:pPr>
+            <a:r>
+              <a:t>Set penalty minutes to 0 for players without any saved penalties </a:t>
+            </a:r>
+          </a:p>
+          <a:p>
+            <a:pPr lvl="1" marL="641684" indent="-260684">
+              <a:buSzPct val="100000"/>
+              <a:buChar char="•"/>
+              <a:defRPr sz="2300"/>
+            </a:pPr>
+            <a:r>
+              <a:t>Newly calculated shooting percentage since values beforehand didn’t seem </a:t>
+            </a:r>
+          </a:p>
+          <a:p>
+            <a:pPr lvl="2" indent="457200">
+              <a:defRPr sz="2300"/>
+            </a:pPr>
+            <a:r>
+              <a:t>  sensible -&gt; Equation: shooting percentage = goals/ number of shots * 100</a:t>
+            </a:r>
+          </a:p>
+          <a:p>
+            <a:pPr lvl="2" indent="457200">
+              <a:defRPr sz="2300"/>
+            </a:pPr>
+          </a:p>
+          <a:p>
+            <a:pPr marL="260684" indent="-260684">
+              <a:buSzPct val="100000"/>
+              <a:buChar char="•"/>
+            </a:pPr>
+            <a:r>
+              <a:t>Medical </a:t>
+            </a:r>
+          </a:p>
+          <a:p>
+            <a:pPr lvl="1" marL="641684" indent="-260684">
+              <a:buSzPct val="100000"/>
+              <a:buChar char="•"/>
+            </a:pPr>
+          </a:p>
+          <a:p>
+            <a:pPr lvl="1" marL="641684" indent="-260684">
+              <a:buSzPct val="100000"/>
+              <a:buChar char="•"/>
+            </a:pPr>
+          </a:p>
+          <a:p>
+            <a:pPr lvl="1" marL="641684" indent="-260684">
+              <a:buSzPct val="100000"/>
+              <a:buChar char="•"/>
+            </a:pPr>
+          </a:p>
+          <a:p>
+            <a:pPr marL="260684" indent="-260684">
+              <a:buSzPct val="100000"/>
+              <a:buChar char="•"/>
+            </a:pPr>
           </a:p>
         </p:txBody>
       </p:sp>
